--- a/LAB 1/Марков Марк.pptx
+++ b/LAB 1/Марков Марк.pptx
@@ -210,7 +210,7 @@
           <a:p>
             <a:fld id="{1D8BD707-D9CF-40AE-B4C6-C98DA3205C09}" type="datetimeFigureOut">
               <a:rPr lang="en-US"/>
-              <a:t>9/28/2026</a:t>
+              <a:t>9/29/2026</a:t>
             </a:fld>
             <a:endParaRPr lang="en-US" dirty="0"/>
           </a:p>
@@ -387,7 +387,7 @@
           <a:p>
             <a:fld id="{1D8BD707-D9CF-40AE-B4C6-C98DA3205C09}" type="datetimeFigureOut">
               <a:rPr lang="en-US"/>
-              <a:t>9/28/2026</a:t>
+              <a:t>9/29/2026</a:t>
             </a:fld>
             <a:endParaRPr lang="en-US" dirty="0"/>
           </a:p>
@@ -601,7 +601,7 @@
           <a:p>
             <a:fld id="{1D8BD707-D9CF-40AE-B4C6-C98DA3205C09}" type="datetimeFigureOut">
               <a:rPr lang="en-US"/>
-              <a:t>9/28/2026</a:t>
+              <a:t>9/29/2026</a:t>
             </a:fld>
             <a:endParaRPr lang="en-US" dirty="0"/>
           </a:p>
@@ -749,7 +749,7 @@
           <a:p>
             <a:fld id="{1D8BD707-D9CF-40AE-B4C6-C98DA3205C09}" type="datetimeFigureOut">
               <a:rPr lang="en-US"/>
-              <a:t>9/28/2026</a:t>
+              <a:t>9/29/2026</a:t>
             </a:fld>
             <a:endParaRPr lang="en-US" dirty="0"/>
           </a:p>
@@ -868,7 +868,7 @@
           <a:p>
             <a:fld id="{1D8BD707-D9CF-40AE-B4C6-C98DA3205C09}" type="datetimeFigureOut">
               <a:rPr lang="en-US"/>
-              <a:t>9/28/2026</a:t>
+              <a:t>9/29/2026</a:t>
             </a:fld>
             <a:endParaRPr lang="en-US" dirty="0"/>
           </a:p>
@@ -1137,7 +1137,7 @@
           <a:p>
             <a:fld id="{1D8BD707-D9CF-40AE-B4C6-C98DA3205C09}" type="datetimeFigureOut">
               <a:rPr lang="en-US"/>
-              <a:t>9/28/2026</a:t>
+              <a:t>9/29/2026</a:t>
             </a:fld>
             <a:endParaRPr lang="en-US" dirty="0"/>
           </a:p>
@@ -32301,7 +32301,7 @@
                 <a:latin typeface="Calibri"/>
                 <a:cs typeface="Calibri"/>
               </a:rPr>
-              <a:t>в зашифрования и расшифрования шести классических шифров.</a:t>
+              <a:t>в зашифрование и расшифрование шести классических шифров.</a:t>
             </a:r>
           </a:p>
           <a:p>
@@ -37632,7 +37632,37 @@
                 <a:latin typeface="Calibri"/>
                 <a:cs typeface="Calibri"/>
               </a:rPr>
-              <a:t>Изучен шифр Vigenere и выявлены его следующие основные характеристики: моноалфавитный шифр с периодическим ключом, ломается автокорреляцией и частотным анализом.</a:t>
+              <a:t>Изучен шифр Vigenere и выявлены его следующие основные характеристики: </a:t>
+            </a:r>
+            <a:r>
+              <a:rPr lang="ru-RU" sz="2000" i="1" spc="-10">
+                <a:solidFill>
+                  <a:srgbClr val="161D31"/>
+                </a:solidFill>
+                <a:uFill>
+                  <a:solidFill>
+                    <a:srgbClr val="000000"/>
+                  </a:solidFill>
+                </a:uFill>
+                <a:latin typeface="Calibri"/>
+                <a:cs typeface="Calibri"/>
+              </a:rPr>
+              <a:t>полиалфавитный</a:t>
+            </a:r>
+            <a:r>
+              <a:rPr lang="ru-RU" sz="2000" i="1" spc="-10" dirty="0">
+                <a:solidFill>
+                  <a:srgbClr val="161D31"/>
+                </a:solidFill>
+                <a:uFill>
+                  <a:solidFill>
+                    <a:srgbClr val="000000"/>
+                  </a:solidFill>
+                </a:uFill>
+                <a:latin typeface="Calibri"/>
+                <a:cs typeface="Calibri"/>
+              </a:rPr>
+              <a:t> шифр с периодическим ключом, ломается автокорреляцией и частотным анализом.</a:t>
             </a:r>
           </a:p>
           <a:p>
